--- a/docs/presentations/PayWise_중간발표.pptx
+++ b/docs/presentations/PayWise_중간발표.pptx
@@ -1611,6 +1611,10 @@
             <a:prstDash val="solid"/>
           </a:ln>
         </p:spPr>
+        <p:txBody>
+          <a:bodyPr/>
+          <a:p/>
+        </p:txBody>
       </p:sp>
       <p:sp>
         <p:nvSpPr>
@@ -1636,6 +1640,10 @@
             <a:prstDash val="solid"/>
           </a:ln>
         </p:spPr>
+        <p:txBody>
+          <a:bodyPr/>
+          <a:p/>
+        </p:txBody>
       </p:sp>
       <p:sp>
         <p:nvSpPr>
@@ -1665,6 +1673,10 @@
             <a:prstDash val="solid"/>
           </a:ln>
         </p:spPr>
+        <p:txBody>
+          <a:bodyPr/>
+          <a:p/>
+        </p:txBody>
       </p:sp>
       <p:sp>
         <p:nvSpPr>
@@ -1729,6 +1741,10 @@
             <a:prstDash val="solid"/>
           </a:ln>
         </p:spPr>
+        <p:txBody>
+          <a:bodyPr/>
+          <a:p/>
+        </p:txBody>
       </p:sp>
       <p:sp>
         <p:nvSpPr>
@@ -1834,6 +1850,10 @@
             <a:prstDash val="solid"/>
           </a:ln>
         </p:spPr>
+        <p:txBody>
+          <a:bodyPr/>
+          <a:p/>
+        </p:txBody>
       </p:sp>
       <p:sp>
         <p:nvSpPr>
@@ -1934,6 +1954,10 @@
             <a:prstDash val="solid"/>
           </a:ln>
         </p:spPr>
+        <p:txBody>
+          <a:bodyPr/>
+          <a:p/>
+        </p:txBody>
       </p:sp>
       <p:pic>
         <p:nvPicPr>
@@ -1985,6 +2009,10 @@
             <a:prstDash val="solid"/>
           </a:ln>
         </p:spPr>
+        <p:txBody>
+          <a:bodyPr/>
+          <a:p/>
+        </p:txBody>
       </p:sp>
       <p:pic>
         <p:nvPicPr>
@@ -2036,6 +2064,10 @@
             <a:prstDash val="solid"/>
           </a:ln>
         </p:spPr>
+        <p:txBody>
+          <a:bodyPr/>
+          <a:p/>
+        </p:txBody>
       </p:sp>
       <p:pic>
         <p:nvPicPr>
@@ -2117,6 +2149,10 @@
             <a:prstDash val="solid"/>
           </a:ln>
         </p:spPr>
+        <p:txBody>
+          <a:bodyPr/>
+          <a:p/>
+        </p:txBody>
       </p:sp>
       <p:sp>
         <p:nvSpPr>
@@ -2181,6 +2217,10 @@
             <a:prstDash val="solid"/>
           </a:ln>
         </p:spPr>
+        <p:txBody>
+          <a:bodyPr/>
+          <a:p/>
+        </p:txBody>
       </p:sp>
       <p:sp>
         <p:nvSpPr>
@@ -2206,6 +2246,10 @@
             <a:prstDash val="solid"/>
           </a:ln>
         </p:spPr>
+        <p:txBody>
+          <a:bodyPr/>
+          <a:p/>
+        </p:txBody>
       </p:sp>
       <p:sp>
         <p:nvSpPr>
@@ -2348,6 +2392,10 @@
             <a:prstDash val="solid"/>
           </a:ln>
         </p:spPr>
+        <p:txBody>
+          <a:bodyPr/>
+          <a:p/>
+        </p:txBody>
       </p:sp>
       <p:sp>
         <p:nvSpPr>
@@ -2373,6 +2421,10 @@
             <a:prstDash val="solid"/>
           </a:ln>
         </p:spPr>
+        <p:txBody>
+          <a:bodyPr/>
+          <a:p/>
+        </p:txBody>
       </p:sp>
       <p:sp>
         <p:nvSpPr>
@@ -2515,6 +2567,10 @@
             <a:prstDash val="solid"/>
           </a:ln>
         </p:spPr>
+        <p:txBody>
+          <a:bodyPr/>
+          <a:p/>
+        </p:txBody>
       </p:sp>
       <p:sp>
         <p:nvSpPr>
@@ -2540,6 +2596,10 @@
             <a:prstDash val="solid"/>
           </a:ln>
         </p:spPr>
+        <p:txBody>
+          <a:bodyPr/>
+          <a:p/>
+        </p:txBody>
       </p:sp>
       <p:sp>
         <p:nvSpPr>
@@ -2682,6 +2742,10 @@
             <a:prstDash val="solid"/>
           </a:ln>
         </p:spPr>
+        <p:txBody>
+          <a:bodyPr/>
+          <a:p/>
+        </p:txBody>
       </p:sp>
       <p:sp>
         <p:nvSpPr>
@@ -2707,6 +2771,10 @@
             <a:prstDash val="solid"/>
           </a:ln>
         </p:spPr>
+        <p:txBody>
+          <a:bodyPr/>
+          <a:p/>
+        </p:txBody>
       </p:sp>
       <p:sp>
         <p:nvSpPr>
@@ -2780,7 +2848,7 @@
                 <a:ea typeface="Calibri" pitchFamily="34" charset="-122"/>
                 <a:cs typeface="Calibri" pitchFamily="34" charset="-120"/>
               </a:rPr>
-              <a:t>사기 탐지 서비스</a:t>
+              <a:t>거래 리스크 평가</a:t>
             </a:r>
             <a:endParaRPr lang="en-US" sz="1500" dirty="0"/>
           </a:p>
@@ -2819,7 +2887,7 @@
                 <a:ea typeface="Calibri" pitchFamily="34" charset="-122"/>
                 <a:cs typeface="Calibri" pitchFamily="34" charset="-120"/>
               </a:rPr>
-              <a:t>Hybrid IF+RF · 규칙 엔진 · Step-up Auth</a:t>
+              <a:t>IF+부스팅 하이브리드 · 규칙 엔진 · Step-up Auth</a:t>
             </a:r>
             <a:endParaRPr lang="en-US" sz="1000" dirty="0"/>
           </a:p>
@@ -2849,6 +2917,10 @@
             <a:prstDash val="solid"/>
           </a:ln>
         </p:spPr>
+        <p:txBody>
+          <a:bodyPr/>
+          <a:p/>
+        </p:txBody>
       </p:sp>
       <p:sp>
         <p:nvSpPr>
@@ -2874,6 +2946,10 @@
             <a:prstDash val="solid"/>
           </a:ln>
         </p:spPr>
+        <p:txBody>
+          <a:bodyPr/>
+          <a:p/>
+        </p:txBody>
       </p:sp>
       <p:sp>
         <p:nvSpPr>
@@ -3016,6 +3092,10 @@
             <a:prstDash val="solid"/>
           </a:ln>
         </p:spPr>
+        <p:txBody>
+          <a:bodyPr/>
+          <a:p/>
+        </p:txBody>
       </p:sp>
       <p:sp>
         <p:nvSpPr>
@@ -3041,6 +3121,10 @@
             <a:prstDash val="solid"/>
           </a:ln>
         </p:spPr>
+        <p:txBody>
+          <a:bodyPr/>
+          <a:p/>
+        </p:txBody>
       </p:sp>
       <p:sp>
         <p:nvSpPr>
@@ -3215,6 +3299,10 @@
             <a:prstDash val="solid"/>
           </a:ln>
         </p:spPr>
+        <p:txBody>
+          <a:bodyPr/>
+          <a:p/>
+        </p:txBody>
       </p:sp>
       <p:sp>
         <p:nvSpPr>
@@ -3240,6 +3328,10 @@
             <a:prstDash val="solid"/>
           </a:ln>
         </p:spPr>
+        <p:txBody>
+          <a:bodyPr/>
+          <a:p/>
+        </p:txBody>
       </p:sp>
       <p:sp>
         <p:nvSpPr>
@@ -3311,6 +3403,10 @@
             </a:outerShdw>
           </a:effectLst>
         </p:spPr>
+        <p:txBody>
+          <a:bodyPr/>
+          <a:p/>
+        </p:txBody>
       </p:sp>
       <p:sp>
         <p:nvSpPr>
@@ -3336,6 +3432,10 @@
             <a:prstDash val="solid"/>
           </a:ln>
         </p:spPr>
+        <p:txBody>
+          <a:bodyPr/>
+          <a:p/>
+        </p:txBody>
       </p:sp>
       <p:sp>
         <p:nvSpPr>
@@ -3501,6 +3601,10 @@
             </a:outerShdw>
           </a:effectLst>
         </p:spPr>
+        <p:txBody>
+          <a:bodyPr/>
+          <a:p/>
+        </p:txBody>
       </p:sp>
       <p:sp>
         <p:nvSpPr>
@@ -3526,6 +3630,10 @@
             <a:prstDash val="solid"/>
           </a:ln>
         </p:spPr>
+        <p:txBody>
+          <a:bodyPr/>
+          <a:p/>
+        </p:txBody>
       </p:sp>
       <p:sp>
         <p:nvSpPr>
@@ -3730,6 +3838,10 @@
             </a:outerShdw>
           </a:effectLst>
         </p:spPr>
+        <p:txBody>
+          <a:bodyPr/>
+          <a:p/>
+        </p:txBody>
       </p:sp>
       <p:sp>
         <p:nvSpPr>
@@ -3755,6 +3867,10 @@
             <a:prstDash val="solid"/>
           </a:ln>
         </p:spPr>
+        <p:txBody>
+          <a:bodyPr/>
+          <a:p/>
+        </p:txBody>
       </p:sp>
       <p:pic>
         <p:nvPicPr>
@@ -3867,6 +3983,10 @@
             </a:outerShdw>
           </a:effectLst>
         </p:spPr>
+        <p:txBody>
+          <a:bodyPr/>
+          <a:p/>
+        </p:txBody>
       </p:sp>
       <p:sp>
         <p:nvSpPr>
@@ -3892,6 +4012,10 @@
             <a:prstDash val="solid"/>
           </a:ln>
         </p:spPr>
+        <p:txBody>
+          <a:bodyPr/>
+          <a:p/>
+        </p:txBody>
       </p:sp>
       <p:pic>
         <p:nvPicPr>
@@ -4004,6 +4128,10 @@
             </a:outerShdw>
           </a:effectLst>
         </p:spPr>
+        <p:txBody>
+          <a:bodyPr/>
+          <a:p/>
+        </p:txBody>
       </p:sp>
       <p:sp>
         <p:nvSpPr>
@@ -4029,6 +4157,10 @@
             <a:prstDash val="solid"/>
           </a:ln>
         </p:spPr>
+        <p:txBody>
+          <a:bodyPr/>
+          <a:p/>
+        </p:txBody>
       </p:sp>
       <p:pic>
         <p:nvPicPr>
@@ -4141,6 +4273,10 @@
             </a:outerShdw>
           </a:effectLst>
         </p:spPr>
+        <p:txBody>
+          <a:bodyPr/>
+          <a:p/>
+        </p:txBody>
       </p:sp>
       <p:sp>
         <p:nvSpPr>
@@ -4166,6 +4302,10 @@
             <a:prstDash val="solid"/>
           </a:ln>
         </p:spPr>
+        <p:txBody>
+          <a:bodyPr/>
+          <a:p/>
+        </p:txBody>
       </p:sp>
       <p:pic>
         <p:nvPicPr>
@@ -4303,6 +4443,10 @@
             <a:prstDash val="solid"/>
           </a:ln>
         </p:spPr>
+        <p:txBody>
+          <a:bodyPr/>
+          <a:p/>
+        </p:txBody>
       </p:sp>
       <p:sp>
         <p:nvSpPr>
@@ -4328,6 +4472,10 @@
             <a:prstDash val="solid"/>
           </a:ln>
         </p:spPr>
+        <p:txBody>
+          <a:bodyPr/>
+          <a:p/>
+        </p:txBody>
       </p:sp>
       <p:sp>
         <p:nvSpPr>
@@ -4399,6 +4547,10 @@
             </a:outerShdw>
           </a:effectLst>
         </p:spPr>
+        <p:txBody>
+          <a:bodyPr/>
+          <a:p/>
+        </p:txBody>
       </p:sp>
       <p:pic>
         <p:nvPicPr>
@@ -4543,6 +4695,10 @@
             <a:prstDash val="solid"/>
           </a:ln>
         </p:spPr>
+        <p:txBody>
+          <a:bodyPr/>
+          <a:p/>
+        </p:txBody>
       </p:sp>
       <p:sp>
         <p:nvSpPr>
@@ -4575,6 +4731,10 @@
             </a:outerShdw>
           </a:effectLst>
         </p:spPr>
+        <p:txBody>
+          <a:bodyPr/>
+          <a:p/>
+        </p:txBody>
       </p:sp>
       <p:pic>
         <p:nvPicPr>
@@ -4719,6 +4879,10 @@
             <a:prstDash val="solid"/>
           </a:ln>
         </p:spPr>
+        <p:txBody>
+          <a:bodyPr/>
+          <a:p/>
+        </p:txBody>
       </p:sp>
       <p:sp>
         <p:nvSpPr>
@@ -4751,6 +4915,10 @@
             </a:outerShdw>
           </a:effectLst>
         </p:spPr>
+        <p:txBody>
+          <a:bodyPr/>
+          <a:p/>
+        </p:txBody>
       </p:sp>
       <p:pic>
         <p:nvPicPr>
@@ -4895,6 +5063,10 @@
             <a:prstDash val="solid"/>
           </a:ln>
         </p:spPr>
+        <p:txBody>
+          <a:bodyPr/>
+          <a:p/>
+        </p:txBody>
       </p:sp>
       <p:sp>
         <p:nvSpPr>
@@ -4966,6 +5138,10 @@
             </a:outerShdw>
           </a:effectLst>
         </p:spPr>
+        <p:txBody>
+          <a:bodyPr/>
+          <a:p/>
+        </p:txBody>
       </p:sp>
       <p:sp>
         <p:nvSpPr>
@@ -4991,6 +5167,10 @@
             <a:prstDash val="solid"/>
           </a:ln>
         </p:spPr>
+        <p:txBody>
+          <a:bodyPr/>
+          <a:p/>
+        </p:txBody>
       </p:sp>
       <p:pic>
         <p:nvPicPr>
@@ -5088,7 +5268,7 @@
                 <a:ea typeface="Calibri" pitchFamily="34" charset="-122"/>
                 <a:cs typeface="Calibri" pitchFamily="34" charset="-120"/>
               </a:rPr>
-              <a:t>IF · RF 사기 탐지 추론 API</a:t>
+              <a:t>IF · XGBoost 거래리스크 추론 API</a:t>
             </a:r>
             <a:endParaRPr lang="en-US" sz="1000" dirty="0"/>
           </a:p>
@@ -5142,6 +5322,10 @@
             </a:outerShdw>
           </a:effectLst>
         </p:spPr>
+        <p:txBody>
+          <a:bodyPr/>
+          <a:p/>
+        </p:txBody>
       </p:sp>
       <p:sp>
         <p:nvSpPr>
@@ -5167,6 +5351,10 @@
             <a:prstDash val="solid"/>
           </a:ln>
         </p:spPr>
+        <p:txBody>
+          <a:bodyPr/>
+          <a:p/>
+        </p:txBody>
       </p:sp>
       <p:pic>
         <p:nvPicPr>
@@ -5318,6 +5506,10 @@
             </a:outerShdw>
           </a:effectLst>
         </p:spPr>
+        <p:txBody>
+          <a:bodyPr/>
+          <a:p/>
+        </p:txBody>
       </p:sp>
       <p:sp>
         <p:nvSpPr>
@@ -5343,6 +5535,10 @@
             <a:prstDash val="solid"/>
           </a:ln>
         </p:spPr>
+        <p:txBody>
+          <a:bodyPr/>
+          <a:p/>
+        </p:txBody>
       </p:sp>
       <p:pic>
         <p:nvPicPr>
@@ -5519,6 +5715,10 @@
             <a:prstDash val="solid"/>
           </a:ln>
         </p:spPr>
+        <p:txBody>
+          <a:bodyPr/>
+          <a:p/>
+        </p:txBody>
       </p:sp>
       <p:sp>
         <p:nvSpPr>
@@ -5544,6 +5744,10 @@
             <a:prstDash val="solid"/>
           </a:ln>
         </p:spPr>
+        <p:txBody>
+          <a:bodyPr/>
+          <a:p/>
+        </p:txBody>
       </p:sp>
       <p:sp>
         <p:nvSpPr>
@@ -5615,6 +5819,10 @@
             </a:outerShdw>
           </a:effectLst>
         </p:spPr>
+        <p:txBody>
+          <a:bodyPr/>
+          <a:p/>
+        </p:txBody>
       </p:sp>
       <p:sp>
         <p:nvSpPr>
@@ -5640,6 +5848,10 @@
             <a:prstDash val="solid"/>
           </a:ln>
         </p:spPr>
+        <p:txBody>
+          <a:bodyPr/>
+          <a:p/>
+        </p:txBody>
       </p:sp>
       <p:pic>
         <p:nvPicPr>
@@ -5847,6 +6059,10 @@
             </a:outerShdw>
           </a:effectLst>
         </p:spPr>
+        <p:txBody>
+          <a:bodyPr/>
+          <a:p/>
+        </p:txBody>
       </p:sp>
       <p:sp>
         <p:nvSpPr>
@@ -5872,6 +6088,10 @@
             <a:prstDash val="solid"/>
           </a:ln>
         </p:spPr>
+        <p:txBody>
+          <a:bodyPr/>
+          <a:p/>
+        </p:txBody>
       </p:sp>
       <p:pic>
         <p:nvPicPr>
@@ -6079,6 +6299,10 @@
             </a:outerShdw>
           </a:effectLst>
         </p:spPr>
+        <p:txBody>
+          <a:bodyPr/>
+          <a:p/>
+        </p:txBody>
       </p:sp>
       <p:sp>
         <p:nvSpPr>
@@ -6104,6 +6328,10 @@
             <a:prstDash val="solid"/>
           </a:ln>
         </p:spPr>
+        <p:txBody>
+          <a:bodyPr/>
+          <a:p/>
+        </p:txBody>
       </p:sp>
       <p:pic>
         <p:nvPicPr>
@@ -6311,6 +6539,10 @@
             </a:outerShdw>
           </a:effectLst>
         </p:spPr>
+        <p:txBody>
+          <a:bodyPr/>
+          <a:p/>
+        </p:txBody>
       </p:sp>
       <p:sp>
         <p:nvSpPr>
@@ -6336,6 +6568,10 @@
             <a:prstDash val="solid"/>
           </a:ln>
         </p:spPr>
+        <p:txBody>
+          <a:bodyPr/>
+          <a:p/>
+        </p:txBody>
       </p:sp>
       <p:pic>
         <p:nvPicPr>
@@ -6607,6 +6843,10 @@
             <a:prstDash val="solid"/>
           </a:ln>
         </p:spPr>
+        <p:txBody>
+          <a:bodyPr/>
+          <a:p/>
+        </p:txBody>
       </p:sp>
       <p:sp>
         <p:nvSpPr>
@@ -6632,6 +6872,10 @@
             <a:prstDash val="solid"/>
           </a:ln>
         </p:spPr>
+        <p:txBody>
+          <a:bodyPr/>
+          <a:p/>
+        </p:txBody>
       </p:sp>
       <p:sp>
         <p:nvSpPr>
@@ -6666,7 +6910,7 @@
                 <a:ea typeface="Calibri" pitchFamily="34" charset="-122"/>
                 <a:cs typeface="Calibri" pitchFamily="34" charset="-120"/>
               </a:rPr>
-              <a:t>04  사기 탐지 서비스 (fraud-service)</a:t>
+              <a:t>04  거래 리스크 평가 (fraud-service)</a:t>
             </a:r>
             <a:endParaRPr lang="en-US" sz="2000" dirty="0"/>
           </a:p>
@@ -6703,6 +6947,10 @@
             </a:outerShdw>
           </a:effectLst>
         </p:spPr>
+        <p:txBody>
+          <a:bodyPr/>
+          <a:p/>
+        </p:txBody>
       </p:sp>
       <p:sp>
         <p:nvSpPr>
@@ -6767,6 +7015,10 @@
             <a:prstDash val="solid"/>
           </a:ln>
         </p:spPr>
+        <p:txBody>
+          <a:bodyPr/>
+          <a:p/>
+        </p:txBody>
       </p:sp>
       <p:sp>
         <p:nvSpPr>
@@ -6870,6 +7122,10 @@
             <a:prstDash val="solid"/>
           </a:ln>
         </p:spPr>
+        <p:txBody>
+          <a:bodyPr/>
+          <a:p/>
+        </p:txBody>
       </p:sp>
       <p:sp>
         <p:nvSpPr>
@@ -6973,6 +7229,10 @@
             <a:prstDash val="solid"/>
           </a:ln>
         </p:spPr>
+        <p:txBody>
+          <a:bodyPr/>
+          <a:p/>
+        </p:txBody>
       </p:sp>
       <p:sp>
         <p:nvSpPr>
@@ -7076,6 +7336,10 @@
             <a:prstDash val="solid"/>
           </a:ln>
         </p:spPr>
+        <p:txBody>
+          <a:bodyPr/>
+          <a:p/>
+        </p:txBody>
       </p:sp>
       <p:sp>
         <p:nvSpPr>
@@ -7179,6 +7443,10 @@
             <a:prstDash val="solid"/>
           </a:ln>
         </p:spPr>
+        <p:txBody>
+          <a:bodyPr/>
+          <a:p/>
+        </p:txBody>
       </p:sp>
       <p:sp>
         <p:nvSpPr>
@@ -7250,6 +7518,10 @@
             </a:outerShdw>
           </a:effectLst>
         </p:spPr>
+        <p:txBody>
+          <a:bodyPr/>
+          <a:p/>
+        </p:txBody>
       </p:sp>
       <p:sp>
         <p:nvSpPr>
@@ -7275,6 +7547,10 @@
             <a:prstDash val="solid"/>
           </a:ln>
         </p:spPr>
+        <p:txBody>
+          <a:bodyPr/>
+          <a:p/>
+        </p:txBody>
       </p:sp>
       <p:pic>
         <p:nvPicPr>
@@ -7426,6 +7702,10 @@
             </a:outerShdw>
           </a:effectLst>
         </p:spPr>
+        <p:txBody>
+          <a:bodyPr/>
+          <a:p/>
+        </p:txBody>
       </p:sp>
       <p:sp>
         <p:nvSpPr>
@@ -7451,6 +7731,10 @@
             <a:prstDash val="solid"/>
           </a:ln>
         </p:spPr>
+        <p:txBody>
+          <a:bodyPr/>
+          <a:p/>
+        </p:txBody>
       </p:sp>
       <p:pic>
         <p:nvPicPr>
@@ -7509,7 +7793,7 @@
                 <a:ea typeface="Calibri" pitchFamily="34" charset="-122"/>
                 <a:cs typeface="Calibri" pitchFamily="34" charset="-120"/>
               </a:rPr>
-              <a:t>Random Forest (지도)</a:t>
+              <a:t>XGBoost (지도)</a:t>
             </a:r>
             <a:endParaRPr lang="en-US" sz="1200" dirty="0"/>
           </a:p>
@@ -7548,7 +7832,7 @@
                 <a:ea typeface="Calibri" pitchFamily="34" charset="-122"/>
                 <a:cs typeface="Calibri" pitchFamily="34" charset="-120"/>
               </a:rPr>
-              <a:t>과소비 레이블링 기반</a:t>
+              <a:t>Kaggle creditcard 지도 학습</a:t>
             </a:r>
             <a:endParaRPr lang="en-US" sz="1000" dirty="0"/>
           </a:p>
@@ -7565,7 +7849,7 @@
                 <a:ea typeface="Calibri" pitchFamily="34" charset="-122"/>
                 <a:cs typeface="Calibri" pitchFamily="34" charset="-120"/>
               </a:rPr>
-              <a:t>open 데이터셋 학습 + 제출</a:t>
+              <a:t>이상 스코어 + 5-fold CV</a:t>
             </a:r>
             <a:endParaRPr lang="en-US" sz="1000" dirty="0"/>
           </a:p>
@@ -7602,6 +7886,10 @@
             </a:outerShdw>
           </a:effectLst>
         </p:spPr>
+        <p:txBody>
+          <a:bodyPr/>
+          <a:p/>
+        </p:txBody>
       </p:sp>
       <p:sp>
         <p:nvSpPr>
@@ -7627,6 +7915,10 @@
             <a:prstDash val="solid"/>
           </a:ln>
         </p:spPr>
+        <p:txBody>
+          <a:bodyPr/>
+          <a:p/>
+        </p:txBody>
       </p:sp>
       <p:pic>
         <p:nvPicPr>
@@ -7685,7 +7977,7 @@
                 <a:ea typeface="Calibri" pitchFamily="34" charset="-122"/>
                 <a:cs typeface="Calibri" pitchFamily="34" charset="-120"/>
               </a:rPr>
-              <a:t>Hybrid IF + RF</a:t>
+              <a:t>IF + 부스팅 하이브리드</a:t>
             </a:r>
             <a:endParaRPr lang="en-US" sz="1200" dirty="0"/>
           </a:p>
@@ -7741,7 +8033,7 @@
                 <a:ea typeface="Calibri" pitchFamily="34" charset="-122"/>
                 <a:cs typeface="Calibri" pitchFamily="34" charset="-120"/>
               </a:rPr>
-              <a:t>RF 분류 → 비교 분석 CSV</a:t>
+              <a:t>XGBoost 분류 → 비교 분석</a:t>
             </a:r>
             <a:endParaRPr lang="en-US" sz="1000" dirty="0"/>
           </a:p>
@@ -7778,6 +8070,10 @@
             </a:outerShdw>
           </a:effectLst>
         </p:spPr>
+        <p:txBody>
+          <a:bodyPr/>
+          <a:p/>
+        </p:txBody>
       </p:sp>
       <p:sp>
         <p:nvSpPr>
@@ -7803,6 +8099,10 @@
             <a:prstDash val="solid"/>
           </a:ln>
         </p:spPr>
+        <p:txBody>
+          <a:bodyPr/>
+          <a:p/>
+        </p:txBody>
       </p:sp>
       <p:pic>
         <p:nvPicPr>
@@ -7979,6 +8279,10 @@
             <a:prstDash val="solid"/>
           </a:ln>
         </p:spPr>
+        <p:txBody>
+          <a:bodyPr/>
+          <a:p/>
+        </p:txBody>
       </p:sp>
       <p:sp>
         <p:nvSpPr>
@@ -8004,6 +8308,10 @@
             <a:prstDash val="solid"/>
           </a:ln>
         </p:spPr>
+        <p:txBody>
+          <a:bodyPr/>
+          <a:p/>
+        </p:txBody>
       </p:sp>
       <p:sp>
         <p:nvSpPr>
@@ -8075,6 +8383,10 @@
             </a:outerShdw>
           </a:effectLst>
         </p:spPr>
+        <p:txBody>
+          <a:bodyPr/>
+          <a:p/>
+        </p:txBody>
       </p:sp>
       <p:sp>
         <p:nvSpPr>
@@ -8100,6 +8412,10 @@
             <a:prstDash val="solid"/>
           </a:ln>
         </p:spPr>
+        <p:txBody>
+          <a:bodyPr/>
+          <a:p/>
+        </p:txBody>
       </p:sp>
       <p:pic>
         <p:nvPicPr>
@@ -8268,6 +8584,10 @@
             </a:outerShdw>
           </a:effectLst>
         </p:spPr>
+        <p:txBody>
+          <a:bodyPr/>
+          <a:p/>
+        </p:txBody>
       </p:sp>
       <p:sp>
         <p:nvSpPr>
@@ -8293,6 +8613,10 @@
             <a:prstDash val="solid"/>
           </a:ln>
         </p:spPr>
+        <p:txBody>
+          <a:bodyPr/>
+          <a:p/>
+        </p:txBody>
       </p:sp>
       <p:pic>
         <p:nvPicPr>
@@ -8461,6 +8785,10 @@
             </a:outerShdw>
           </a:effectLst>
         </p:spPr>
+        <p:txBody>
+          <a:bodyPr/>
+          <a:p/>
+        </p:txBody>
       </p:sp>
       <p:sp>
         <p:nvSpPr>
@@ -8486,6 +8814,10 @@
             <a:prstDash val="solid"/>
           </a:ln>
         </p:spPr>
+        <p:txBody>
+          <a:bodyPr/>
+          <a:p/>
+        </p:txBody>
       </p:sp>
       <p:pic>
         <p:nvPicPr>
@@ -8654,6 +8986,10 @@
             </a:outerShdw>
           </a:effectLst>
         </p:spPr>
+        <p:txBody>
+          <a:bodyPr/>
+          <a:p/>
+        </p:txBody>
       </p:sp>
       <p:sp>
         <p:nvSpPr>
@@ -8679,6 +9015,10 @@
             <a:prstDash val="solid"/>
           </a:ln>
         </p:spPr>
+        <p:txBody>
+          <a:bodyPr/>
+          <a:p/>
+        </p:txBody>
       </p:sp>
       <p:pic>
         <p:nvPicPr>
@@ -8847,6 +9187,10 @@
             </a:outerShdw>
           </a:effectLst>
         </p:spPr>
+        <p:txBody>
+          <a:bodyPr/>
+          <a:p/>
+        </p:txBody>
       </p:sp>
       <p:sp>
         <p:nvSpPr>
@@ -8872,6 +9216,10 @@
             <a:prstDash val="solid"/>
           </a:ln>
         </p:spPr>
+        <p:txBody>
+          <a:bodyPr/>
+          <a:p/>
+        </p:txBody>
       </p:sp>
       <p:pic>
         <p:nvPicPr>
@@ -9040,6 +9388,10 @@
             </a:outerShdw>
           </a:effectLst>
         </p:spPr>
+        <p:txBody>
+          <a:bodyPr/>
+          <a:p/>
+        </p:txBody>
       </p:sp>
       <p:sp>
         <p:nvSpPr>
@@ -9065,6 +9417,10 @@
             <a:prstDash val="solid"/>
           </a:ln>
         </p:spPr>
+        <p:txBody>
+          <a:bodyPr/>
+          <a:p/>
+        </p:txBody>
       </p:sp>
       <p:pic>
         <p:nvPicPr>
@@ -9162,7 +9518,7 @@
                 <a:ea typeface="Calibri" pitchFamily="34" charset="-122"/>
                 <a:cs typeface="Calibri" pitchFamily="34" charset="-120"/>
               </a:rPr>
-              <a:t>이상 거래 즉시 Push 알림</a:t>
+              <a:t>이상 거래 WebSocket 실시간 알림</a:t>
             </a:r>
             <a:endParaRPr lang="en-US" sz="1000" dirty="0"/>
           </a:p>
@@ -9258,6 +9614,10 @@
             <a:prstDash val="solid"/>
           </a:ln>
         </p:spPr>
+        <p:txBody>
+          <a:bodyPr/>
+          <a:p/>
+        </p:txBody>
       </p:sp>
       <p:sp>
         <p:nvSpPr>
@@ -9283,6 +9643,10 @@
             <a:prstDash val="solid"/>
           </a:ln>
         </p:spPr>
+        <p:txBody>
+          <a:bodyPr/>
+          <a:p/>
+        </p:txBody>
       </p:sp>
       <p:sp>
         <p:nvSpPr>
@@ -9354,6 +9718,10 @@
             </a:outerShdw>
           </a:effectLst>
         </p:spPr>
+        <p:txBody>
+          <a:bodyPr/>
+          <a:p/>
+        </p:txBody>
       </p:sp>
       <p:sp>
         <p:nvSpPr>
@@ -9379,6 +9747,10 @@
             <a:prstDash val="solid"/>
           </a:ln>
         </p:spPr>
+        <p:txBody>
+          <a:bodyPr/>
+          <a:p/>
+        </p:txBody>
       </p:sp>
       <p:sp>
         <p:nvSpPr>
@@ -9489,7 +9861,7 @@
                 <a:ea typeface="Calibri" pitchFamily="34" charset="-122"/>
                 <a:cs typeface="Calibri" pitchFamily="34" charset="-120"/>
               </a:rPr>
-              <a:t>fraud-service: IF·RF·Hybrid 3종 사기탐지 모델</a:t>
+              <a:t>fraud-service: IF·XGBoost·Hybrid 3종 거래리스크 모델</a:t>
             </a:r>
             <a:endParaRPr lang="en-US" sz="1050" dirty="0"/>
           </a:p>
@@ -9543,7 +9915,7 @@
                 <a:ea typeface="Calibri" pitchFamily="34" charset="-122"/>
                 <a:cs typeface="Calibri" pitchFamily="34" charset="-120"/>
               </a:rPr>
-              <a:t>블록체인 감사 로그 + ABE/ABAC 접근 제어</a:t>
+              <a:t>해시 체인 감사 로그 + ABE/ABAC 접근 제어</a:t>
             </a:r>
             <a:endParaRPr lang="en-US" sz="1050" dirty="0"/>
           </a:p>
@@ -9561,7 +9933,7 @@
                 <a:ea typeface="Calibri" pitchFamily="34" charset="-122"/>
                 <a:cs typeface="Calibri" pitchFamily="34" charset="-120"/>
               </a:rPr>
-              <a:t>MyData 동의 관리 · PID 가명처리 구조</a:t>
+              <a:t>MyData 동의 레지스트리(자체 시뮬) · PID 가명처리</a:t>
             </a:r>
             <a:endParaRPr lang="en-US" sz="1050" dirty="0"/>
           </a:p>
@@ -9616,6 +9988,10 @@
             </a:outerShdw>
           </a:effectLst>
         </p:spPr>
+        <p:txBody>
+          <a:bodyPr/>
+          <a:p/>
+        </p:txBody>
       </p:sp>
       <p:sp>
         <p:nvSpPr>
@@ -9641,6 +10017,10 @@
             <a:prstDash val="solid"/>
           </a:ln>
         </p:spPr>
+        <p:txBody>
+          <a:bodyPr/>
+          <a:p/>
+        </p:txBody>
       </p:sp>
       <p:sp>
         <p:nvSpPr>
@@ -9751,7 +10131,7 @@
                 <a:ea typeface="Calibri" pitchFamily="34" charset="-122"/>
                 <a:cs typeface="Calibri" pitchFamily="34" charset="-120"/>
               </a:rPr>
-              <a:t>Federated Learning 시뮬레이션 · 평가 지표 정합성 검증</a:t>
+              <a:t>사기 시나리오 4종 검출률 측정 체계 구축</a:t>
             </a:r>
             <a:endParaRPr lang="en-US" sz="1050" dirty="0"/>
           </a:p>
@@ -9806,6 +10186,10 @@
             </a:outerShdw>
           </a:effectLst>
         </p:spPr>
+        <p:txBody>
+          <a:bodyPr/>
+          <a:p/>
+        </p:txBody>
       </p:sp>
       <p:sp>
         <p:nvSpPr>
@@ -9831,6 +10215,10 @@
             <a:prstDash val="solid"/>
           </a:ln>
         </p:spPr>
+        <p:txBody>
+          <a:bodyPr/>
+          <a:p/>
+        </p:txBody>
       </p:sp>
       <p:sp>
         <p:nvSpPr>
@@ -10021,6 +10409,10 @@
             <a:prstDash val="solid"/>
           </a:ln>
         </p:spPr>
+        <p:txBody>
+          <a:bodyPr/>
+          <a:p/>
+        </p:txBody>
       </p:sp>
       <p:sp>
         <p:nvSpPr>
@@ -10046,6 +10438,10 @@
             <a:prstDash val="solid"/>
           </a:ln>
         </p:spPr>
+        <p:txBody>
+          <a:bodyPr/>
+          <a:p/>
+        </p:txBody>
       </p:sp>
       <p:sp>
         <p:nvSpPr>
@@ -10110,6 +10506,10 @@
             <a:prstDash val="solid"/>
           </a:ln>
         </p:spPr>
+        <p:txBody>
+          <a:bodyPr/>
+          <a:p/>
+        </p:txBody>
       </p:sp>
       <p:sp>
         <p:nvSpPr>
@@ -10174,6 +10574,10 @@
             <a:prstDash val="solid"/>
           </a:ln>
         </p:spPr>
+        <p:txBody>
+          <a:bodyPr/>
+          <a:p/>
+        </p:txBody>
       </p:sp>
       <p:sp>
         <p:nvSpPr>
@@ -10199,6 +10603,10 @@
             <a:prstDash val="solid"/>
           </a:ln>
         </p:spPr>
+        <p:txBody>
+          <a:bodyPr/>
+          <a:p/>
+        </p:txBody>
       </p:sp>
       <p:sp>
         <p:nvSpPr>
@@ -10302,6 +10710,10 @@
             <a:prstDash val="solid"/>
           </a:ln>
         </p:spPr>
+        <p:txBody>
+          <a:bodyPr/>
+          <a:p/>
+        </p:txBody>
       </p:sp>
       <p:sp>
         <p:nvSpPr>
@@ -10327,6 +10739,10 @@
             <a:prstDash val="solid"/>
           </a:ln>
         </p:spPr>
+        <p:txBody>
+          <a:bodyPr/>
+          <a:p/>
+        </p:txBody>
       </p:sp>
       <p:sp>
         <p:nvSpPr>
@@ -10430,6 +10846,10 @@
             <a:prstDash val="solid"/>
           </a:ln>
         </p:spPr>
+        <p:txBody>
+          <a:bodyPr/>
+          <a:p/>
+        </p:txBody>
       </p:sp>
       <p:sp>
         <p:nvSpPr>
@@ -10455,6 +10875,10 @@
             <a:prstDash val="solid"/>
           </a:ln>
         </p:spPr>
+        <p:txBody>
+          <a:bodyPr/>
+          <a:p/>
+        </p:txBody>
       </p:sp>
       <p:sp>
         <p:nvSpPr>
